--- a/slides-export.pptx
+++ b/slides-export.pptx
@@ -27,9 +27,10 @@
     <p:sldId id="275" r:id="rId21"/>
     <p:sldId id="276" r:id="rId22"/>
     <p:sldId id="277" r:id="rId23"/>
+    <p:sldId id="278" r:id="rId24"/>
   </p:sldIdLst>
   <p:notesMasterIdLst>
-    <p:notesMasterId r:id="rId24"/>
+    <p:notesMasterId r:id="rId25"/>
   </p:notesMasterIdLst>
   <p:sldSz cx="9334500" cy="5248275"/>
   <p:notesSz cx="5248275" cy="9334500"/>
@@ -963,7 +964,7 @@
           <a:p>
             <a:r>
               <a:rPr lang="en-US" dirty="0"/>
-              <a:t>用这张趋势图说明“扩大规模带来更低逻辑错误率”才是真正有用的纠错。</a:t>
+              <a:t>第三部分：进入 Willow 代表性实验和工程结果。</a:t>
             </a:r>
             <a:endParaRPr lang="en-US" dirty="0"/>
           </a:p>
@@ -1051,7 +1052,7 @@
           <a:p>
             <a:r>
               <a:rPr lang="en-US" dirty="0"/>
-              <a:t>第三部分：进入 Willow 代表性实验和工程结果。</a:t>
+              <a:t>用这张趋势图说明阈值的意义：只有底层错误率足够低，增加码距才会把逻辑错误率压下去。</a:t>
             </a:r>
             <a:endParaRPr lang="en-US" dirty="0"/>
           </a:p>
@@ -1227,7 +1228,7 @@
           <a:p>
             <a:r>
               <a:rPr lang="en-US" dirty="0"/>
-              <a:t>这一页讲时间线：从初步错误抑制，到更明确的低于阈值行为。</a:t>
+              <a:t>2023 年证明扩大规模开始有用，Willow 则把表面码纠错推进到更清晰的工程阶段。</a:t>
             </a:r>
             <a:endParaRPr lang="en-US" dirty="0"/>
           </a:p>
@@ -1579,7 +1580,11 @@
           <a:p>
             <a:r>
               <a:rPr lang="en-US" dirty="0"/>
-              <a:t>这一页避免过度解读 Willow：它是重要进展，但还不是完整通用容错量子计算。</a:t>
+              <a:t>图里主要在讲 实时解码的工程问题。
+图 a表示错误症状数据是连续产生的，解码器要边接收边处理。
+图 b表示把解码任务拆分、合并、并行处理。
+图 c直接展示解码延迟，这正对应“经典系统必须快速判断错误”。
+图 d说明不同解码方式会影响逻辑错误率。</a:t>
             </a:r>
             <a:endParaRPr lang="en-US" dirty="0"/>
           </a:p>
@@ -1667,7 +1672,7 @@
           <a:p>
             <a:r>
               <a:rPr lang="en-US" dirty="0"/>
-              <a:t>最后用一句话收束：量子纠错是把量子计算从实验演示推向可靠工程系统的核心路径。</a:t>
+              <a:t>含噪声中等规模量子阶段</a:t>
             </a:r>
             <a:endParaRPr lang="en-US" dirty="0"/>
           </a:p>
@@ -1797,6 +1802,94 @@
 </p:notes>
 </file>
 
+<file path=ppt/notesSlides/notesSlide23.xml><?xml version="1.0" encoding="utf-8"?>
+<p:notes xmlns:a="http://schemas.openxmlformats.org/drawingml/2006/main" xmlns:r="http://schemas.openxmlformats.org/officeDocument/2006/relationships" xmlns:p="http://schemas.openxmlformats.org/presentationml/2006/main">
+  <p:cSld>
+    <p:spTree>
+      <p:nvGrpSpPr>
+        <p:cNvPr id="1" name=""/>
+        <p:cNvGrpSpPr/>
+        <p:nvPr/>
+      </p:nvGrpSpPr>
+      <p:grpSpPr>
+        <a:xfrm>
+          <a:off x="0" y="0"/>
+          <a:ext cx="0" cy="0"/>
+          <a:chOff x="0" y="0"/>
+          <a:chExt cx="0" cy="0"/>
+        </a:xfrm>
+      </p:grpSpPr>
+      <p:sp>
+        <p:nvSpPr>
+          <p:cNvPr id="2" name="Slide Image Placeholder 1"/>
+          <p:cNvSpPr>
+            <a:spLocks noGrp="1" noRot="1" noChangeAspect="1"/>
+          </p:cNvSpPr>
+          <p:nvPr>
+            <p:ph type="sldImg"/>
+          </p:nvPr>
+        </p:nvSpPr>
+        <p:spPr/>
+      </p:sp>
+      <p:sp>
+        <p:nvSpPr>
+          <p:cNvPr id="3" name="Notes Placeholder 2"/>
+          <p:cNvSpPr>
+            <a:spLocks noGrp="1"/>
+          </p:cNvSpPr>
+          <p:nvPr>
+            <p:ph type="body" idx="1"/>
+          </p:nvPr>
+        </p:nvSpPr>
+        <p:spPr/>
+        <p:txBody>
+          <a:bodyPr/>
+          <a:lstStyle/>
+          <a:p>
+            <a:r>
+              <a:rPr lang="en-US" dirty="0"/>
+              <a:t/>
+            </a:r>
+            <a:endParaRPr lang="en-US" dirty="0"/>
+          </a:p>
+        </p:txBody>
+      </p:sp>
+      <p:sp>
+        <p:nvSpPr>
+          <p:cNvPr id="4" name="Slide Number Placeholder 3"/>
+          <p:cNvSpPr>
+            <a:spLocks noGrp="1"/>
+          </p:cNvSpPr>
+          <p:nvPr>
+            <p:ph type="sldNum" sz="quarter" idx="10"/>
+          </p:nvPr>
+        </p:nvSpPr>
+        <p:spPr/>
+        <p:txBody>
+          <a:bodyPr/>
+          <a:lstStyle/>
+          <a:p>
+            <a:fld id="{F7021451-1387-4CA6-816F-3879F97B5CBC}" type="slidenum">
+              <a:rPr lang="en-US"/>
+              <a:t>23</a:t>
+            </a:fld>
+            <a:endParaRPr lang="en-US"/>
+          </a:p>
+        </p:txBody>
+      </p:sp>
+    </p:spTree>
+    <p:extLst>
+      <p:ext uri="{BB962C8B-B14F-4D97-AF65-F5344CB8AC3E}">
+        <p14:creationId xmlns:p14="http://schemas.microsoft.com/office/powerpoint/2010/main" val="1024086991"/>
+      </p:ext>
+    </p:extLst>
+  </p:cSld>
+  <p:clrMapOvr>
+    <a:masterClrMapping/>
+  </p:clrMapOvr>
+</p:notes>
+</file>
+
 <file path=ppt/notesSlides/notesSlide3.xml><?xml version="1.0" encoding="utf-8"?>
 <p:notes xmlns:a="http://schemas.openxmlformats.org/drawingml/2006/main" xmlns:r="http://schemas.openxmlformats.org/officeDocument/2006/relationships" xmlns:p="http://schemas.openxmlformats.org/presentationml/2006/main">
   <p:cSld>
@@ -1843,7 +1936,7 @@
           <a:p>
             <a:r>
               <a:rPr lang="en-US" dirty="0"/>
-              <a:t>这一页讲清演示问题：四个候选态中只有 |11&gt; 被 oracle 标记，Grover 通过振幅放大提高它的测量概率，并自然引出长线路可靠性问题。</a:t>
+              <a:t>grover 算法老师在之前的讲解中已经讲过了，所以我在这里就不展开细节，直接抛出一个问题，并且会在下一页用python中的 qiskit 代码来演示这个问题的实现。</a:t>
             </a:r>
             <a:endParaRPr lang="en-US" dirty="0"/>
           </a:p>
@@ -1931,7 +2024,7 @@
           <a:p>
             <a:r>
               <a:rPr lang="en-US" dirty="0"/>
-              <a:t>这一页用 Magic Move 拆解代码模块：导入与建线路、准备叠加态、oracle 标记、振幅放大、测量运行和打印结果。</a:t>
+              <a:t>这一页用 Magic Move 拆解 3 比特 Grover 代码模块：导入与建线路、准备 8 个候选态的叠加、两轮 oracle 标记与振幅放大、测量运行和打印结果。</a:t>
             </a:r>
             <a:endParaRPr lang="en-US" dirty="0"/>
           </a:p>
@@ -2019,7 +2112,7 @@
           <a:p>
             <a:r>
               <a:rPr lang="en-US" dirty="0"/>
-              <a:t>这一页用 Magic Move 拆解代码模块：导入与建线路、准备叠加态、oracle 标记、振幅放大、测量运行和打印结果。</a:t>
+              <a:t>这一页用 Magic Move 拆解 3 比特 Grover 代码模块：导入与建线路、准备 8 个候选态的叠加、两轮 oracle 标记与振幅放大、测量运行和打印结果。</a:t>
             </a:r>
             <a:endParaRPr lang="en-US" dirty="0"/>
           </a:p>
@@ -2107,7 +2200,7 @@
           <a:p>
             <a:r>
               <a:rPr lang="en-US" dirty="0"/>
-              <a:t>这一页用 Magic Move 拆解代码模块：导入与建线路、准备叠加态、oracle 标记、振幅放大、测量运行和打印结果。</a:t>
+              <a:t>这一页用 Magic Move 拆解 3 比特 Grover 代码模块：导入与建线路、准备 8 个候选态的叠加、两轮 oracle 标记与振幅放大、测量运行和打印结果。</a:t>
             </a:r>
             <a:endParaRPr lang="en-US" dirty="0"/>
           </a:p>
@@ -2195,7 +2288,7 @@
           <a:p>
             <a:r>
               <a:rPr lang="en-US" dirty="0"/>
-              <a:t>现场运行代码即可，重点让观众看到 counts 中 |11&gt; 会以最高频率出现。运行后接到下一节：真实规模算法需要更深线路，错误累积会淹没答案，因此需要量子纠错。</a:t>
+              <a:t>展示两种情况。先运行轮次为1，再运行轮次为2。</a:t>
             </a:r>
             <a:endParaRPr lang="en-US" dirty="0"/>
           </a:p>
@@ -3269,6 +3362,45 @@
 <file path=ppt/slides/slide22.xml><?xml version="1.0" encoding="utf-8"?>
 <p:sld xmlns:a="http://schemas.openxmlformats.org/drawingml/2006/main" xmlns:r="http://schemas.openxmlformats.org/officeDocument/2006/relationships" xmlns:p="http://schemas.openxmlformats.org/presentationml/2006/main">
   <p:cSld name="Slide 22">
+    <p:bg>
+      <p:bgPr>
+        <a:blipFill dpi="0" rotWithShape="1">
+          <a:blip r:embed="rId1">
+            <a:lum/>
+          </a:blip>
+          <a:srcRect/>
+          <a:stretch>
+            <a:fillRect/>
+          </a:stretch>
+        </a:blipFill>
+        <a:effectLst/>
+      </p:bgPr>
+    </p:bg>
+    <p:spTree>
+      <p:nvGrpSpPr>
+        <p:cNvPr id="1" name=""/>
+        <p:cNvGrpSpPr/>
+        <p:nvPr/>
+      </p:nvGrpSpPr>
+      <p:grpSpPr>
+        <a:xfrm>
+          <a:off x="0" y="0"/>
+          <a:ext cx="0" cy="0"/>
+          <a:chOff x="0" y="0"/>
+          <a:chExt cx="0" cy="0"/>
+        </a:xfrm>
+      </p:grpSpPr>
+    </p:spTree>
+  </p:cSld>
+  <p:clrMapOvr>
+    <a:masterClrMapping/>
+  </p:clrMapOvr>
+</p:sld>
+</file>
+
+<file path=ppt/slides/slide23.xml><?xml version="1.0" encoding="utf-8"?>
+<p:sld xmlns:a="http://schemas.openxmlformats.org/drawingml/2006/main" xmlns:r="http://schemas.openxmlformats.org/officeDocument/2006/relationships" xmlns:p="http://schemas.openxmlformats.org/presentationml/2006/main">
+  <p:cSld name="Slide 23">
     <p:bg>
       <p:bgPr>
         <a:blipFill dpi="0" rotWithShape="1">
